--- a/lessons-v2/day17/day17.pptx
+++ b/lessons-v2/day17/day17.pptx
@@ -21,9 +21,10 @@
     <p:sldId id="269" r:id="rId15"/>
     <p:sldId id="270" r:id="rId16"/>
     <p:sldId id="271" r:id="rId17"/>
+    <p:sldId id="272" r:id="rId18"/>
   </p:sldIdLst>
   <p:notesMasterIdLst>
-    <p:notesMasterId r:id="rId18"/>
+    <p:notesMasterId r:id="rId19"/>
   </p:notesMasterIdLst>
   <p:sldSz cx="12192000" cy="6858000"/>
   <p:notesSz cx="6858000" cy="12192000"/>
@@ -517,19 +518,23 @@
           <a:p>
             <a:r>
               <a:rPr lang="en-US" dirty="0"/>
-              <a:t>RUN SHEET (~85 min). RUNS HOT — two disciplines (post-ex + infra/cloud) in one day. Pick your
-cuts in the prep routine, on paper. Must-teach spine: priv-esc + its DO, the attack-chain
-artifact, shared responsibility, the policy DO. Everything else flexes.
-00:00 Journey check + hook (low-priv -&gt; root in 20s)           4
-00:04 What a shell is + the post-ex goals                      5
-00:09 Privilege escalation                                    10
-00:19 DO: shell -&gt; linpeas -&gt; priv-esc on Metasploitable2     16
-00:35 Persistence / lateral movement / pivoting                8
-00:43 The attack chain + detection opportunities               7
-00:50 Infrastructure security                                  8
-00:58 Cloud security — shared responsibility                   8
-01:06 DO: fix an open bucket / IAM policy                     10
-01:16 Attack &lt;-&gt; defence + wrap + homework                     4
+              <a:t>RUN SHEET (~85 min). TWO-PART DAY — two disciplines. Treat it as such:
+  PART 1 — post-exploitation (through the attack-chain artifact).  target: DONE by minute 48.
+  PART 2 — infrastructure + cloud.
+  &gt;&gt;&gt; MID-POINT GATE at minute 48: if the priv-esc DO ran long and you're not at "the attack
+      chain" slide, drop persistence/lateral/pivot to a 90-second name-check, do the attack
+      chain, then Part 2 becomes: infra = a 4-min bullet run, shared responsibility (full),
+      the bucket/IAM DO is homework. NEVER cut shared responsibility or the attack-chain artifact.
+00:00 Journey check + hook (low-priv -&gt; root in 20s)           4   ┐
+00:04 What a shell is + the post-ex goals                      5   │
+00:09 Privilege escalation                                    10   │ PART 1
+00:19 DO: shell -&gt; linpeas -&gt; priv-esc on Metasploitable2     16   │ (post-ex,
+00:35 Persistence / lateral movement / pivoting                8   │  done by :48)
+00:43 The attack chain + detection opportunities               7   ┘
+00:50 Infrastructure security                                  8   ┐
+00:58 Cloud security — shared responsibility                   8   │ PART 2
+01:06 DO: fix an open bucket / IAM policy                     10   │ (infra + cloud)
+01:16 Attack &lt;-&gt; defence + wrap + homework                     4   ┘
 CUT FIRST IF SHORT: persistence/lateral/pivot slide to 4 min; infra slide to a 4-min bullet run.
 NEVER CUT: privilege escalation + the priv-esc DO, the attack-chain-with-detection artifact,
 shared responsibility, the bucket/IAM DO.
@@ -804,6 +809,98 @@
           <a:p>
             <a:r>
               <a:rPr lang="en-US" dirty="0"/>
+              <a:t>This whole lab runs on containers (DVWA, Juice Shop) — point that out. The one idea to land:
+"a container is not a VM; the kernel is shared; treat it like a process with extra packaging."
+Kubernetes adds RBAC, network policies, admission control — name it as "the same questions at
+cluster scale", Day 20 careers has a cloud/container path.
+CUT ENTIRELY if behind — it's marked as reading; the homework points at it.</a:t>
+            </a:r>
+            <a:endParaRPr lang="en-US" dirty="0"/>
+          </a:p>
+        </p:txBody>
+      </p:sp>
+      <p:sp>
+        <p:nvSpPr>
+          <p:cNvPr id="4" name="Slide Number Placeholder 3"/>
+          <p:cNvSpPr>
+            <a:spLocks noGrp="1"/>
+          </p:cNvSpPr>
+          <p:nvPr>
+            <p:ph type="sldNum" sz="quarter" idx="10"/>
+          </p:nvPr>
+        </p:nvSpPr>
+        <p:spPr/>
+        <p:txBody>
+          <a:bodyPr/>
+          <a:lstStyle/>
+          <a:p>
+            <a:fld id="{F7021451-1387-4CA6-816F-3879F97B5CBC}" type="slidenum">
+              <a:rPr lang="en-US"/>
+              <a:t>12</a:t>
+            </a:fld>
+            <a:endParaRPr lang="en-US"/>
+          </a:p>
+        </p:txBody>
+      </p:sp>
+    </p:spTree>
+    <p:extLst>
+      <p:ext uri="{BB962C8B-B14F-4D97-AF65-F5344CB8AC3E}">
+        <p14:creationId xmlns:p14="http://schemas.microsoft.com/office/powerpoint/2010/main" val="1024086991"/>
+      </p:ext>
+    </p:extLst>
+  </p:cSld>
+  <p:clrMapOvr>
+    <a:masterClrMapping/>
+  </p:clrMapOvr>
+</p:notes>
+</file>
+
+<file path=ppt/notesSlides/notesSlide13.xml><?xml version="1.0" encoding="utf-8"?>
+<p:notes xmlns:a="http://schemas.openxmlformats.org/drawingml/2006/main" xmlns:r="http://schemas.openxmlformats.org/officeDocument/2006/relationships" xmlns:p="http://schemas.openxmlformats.org/presentationml/2006/main">
+  <p:cSld>
+    <p:spTree>
+      <p:nvGrpSpPr>
+        <p:cNvPr id="1" name=""/>
+        <p:cNvGrpSpPr/>
+        <p:nvPr/>
+      </p:nvGrpSpPr>
+      <p:grpSpPr>
+        <a:xfrm>
+          <a:off x="0" y="0"/>
+          <a:ext cx="0" cy="0"/>
+          <a:chOff x="0" y="0"/>
+          <a:chExt cx="0" cy="0"/>
+        </a:xfrm>
+      </p:grpSpPr>
+      <p:sp>
+        <p:nvSpPr>
+          <p:cNvPr id="2" name="Slide Image Placeholder 1"/>
+          <p:cNvSpPr>
+            <a:spLocks noGrp="1" noRot="1" noChangeAspect="1"/>
+          </p:cNvSpPr>
+          <p:nvPr>
+            <p:ph type="sldImg"/>
+          </p:nvPr>
+        </p:nvSpPr>
+        <p:spPr/>
+      </p:sp>
+      <p:sp>
+        <p:nvSpPr>
+          <p:cNvPr id="3" name="Notes Placeholder 2"/>
+          <p:cNvSpPr>
+            <a:spLocks noGrp="1"/>
+          </p:cNvSpPr>
+          <p:nvPr>
+            <p:ph type="body" idx="1"/>
+          </p:nvPr>
+        </p:nvSpPr>
+        <p:spPr/>
+        <p:txBody>
+          <a:bodyPr/>
+          <a:lstStyle/>
+          <a:p>
+            <a:r>
+              <a:rPr lang="en-US" dirty="0"/>
               <a:t>10 min, paper exercise (no cloud account needed). If you have LocalStack / MinIO set up, do it
 live against a real bucket. Answer key in teacher-notes.
 The skill: reading a policy and spotting "this grants far more than the app needs".</a:t>
@@ -829,7 +926,7 @@
           <a:p>
             <a:fld id="{F7021451-1387-4CA6-816F-3879F97B5CBC}" type="slidenum">
               <a:rPr lang="en-US"/>
-              <a:t>12</a:t>
+              <a:t>13</a:t>
             </a:fld>
             <a:endParaRPr lang="en-US"/>
           </a:p>
@@ -848,7 +945,7 @@
 </p:notes>
 </file>
 
-<file path=ppt/notesSlides/notesSlide13.xml><?xml version="1.0" encoding="utf-8"?>
+<file path=ppt/notesSlides/notesSlide14.xml><?xml version="1.0" encoding="utf-8"?>
 <p:notes xmlns:a="http://schemas.openxmlformats.org/drawingml/2006/main" xmlns:r="http://schemas.openxmlformats.org/officeDocument/2006/relationships" xmlns:p="http://schemas.openxmlformats.org/presentationml/2006/main">
   <p:cSld>
     <p:spTree>
@@ -917,7 +1014,7 @@
           <a:p>
             <a:fld id="{F7021451-1387-4CA6-816F-3879F97B5CBC}" type="slidenum">
               <a:rPr lang="en-US"/>
-              <a:t>13</a:t>
+              <a:t>14</a:t>
             </a:fld>
             <a:endParaRPr lang="en-US"/>
           </a:p>
@@ -936,7 +1033,7 @@
 </p:notes>
 </file>
 
-<file path=ppt/notesSlides/notesSlide14.xml><?xml version="1.0" encoding="utf-8"?>
+<file path=ppt/notesSlides/notesSlide15.xml><?xml version="1.0" encoding="utf-8"?>
 <p:notes xmlns:a="http://schemas.openxmlformats.org/drawingml/2006/main" xmlns:r="http://schemas.openxmlformats.org/officeDocument/2006/relationships" xmlns:p="http://schemas.openxmlformats.org/presentationml/2006/main">
   <p:cSld>
     <p:spTree>
@@ -1005,7 +1102,7 @@
           <a:p>
             <a:fld id="{F7021451-1387-4CA6-816F-3879F97B5CBC}" type="slidenum">
               <a:rPr lang="en-US"/>
-              <a:t>14</a:t>
+              <a:t>15</a:t>
             </a:fld>
             <a:endParaRPr lang="en-US"/>
           </a:p>
@@ -1024,7 +1121,7 @@
 </p:notes>
 </file>
 
-<file path=ppt/notesSlides/notesSlide15.xml><?xml version="1.0" encoding="utf-8"?>
+<file path=ppt/notesSlides/notesSlide16.xml><?xml version="1.0" encoding="utf-8"?>
 <p:notes xmlns:a="http://schemas.openxmlformats.org/drawingml/2006/main" xmlns:r="http://schemas.openxmlformats.org/officeDocument/2006/relationships" xmlns:p="http://schemas.openxmlformats.org/presentationml/2006/main">
   <p:cSld>
     <p:spTree>
@@ -1093,7 +1190,7 @@
           <a:p>
             <a:fld id="{F7021451-1387-4CA6-816F-3879F97B5CBC}" type="slidenum">
               <a:rPr lang="en-US"/>
-              <a:t>15</a:t>
+              <a:t>16</a:t>
             </a:fld>
             <a:endParaRPr lang="en-US"/>
           </a:p>
@@ -1112,7 +1209,7 @@
 </p:notes>
 </file>
 
-<file path=ppt/notesSlides/notesSlide16.xml><?xml version="1.0" encoding="utf-8"?>
+<file path=ppt/notesSlides/notesSlide17.xml><?xml version="1.0" encoding="utf-8"?>
 <p:notes xmlns:a="http://schemas.openxmlformats.org/drawingml/2006/main" xmlns:r="http://schemas.openxmlformats.org/officeDocument/2006/relationships" xmlns:p="http://schemas.openxmlformats.org/presentationml/2006/main">
   <p:cSld>
     <p:spTree>
@@ -1182,7 +1279,7 @@
           <a:p>
             <a:fld id="{F7021451-1387-4CA6-816F-3879F97B5CBC}" type="slidenum">
               <a:rPr lang="en-US"/>
-              <a:t>16</a:t>
+              <a:t>17</a:t>
             </a:fld>
             <a:endParaRPr lang="en-US"/>
           </a:p>
@@ -2502,6 +2599,45 @@
 <file path=ppt/slides/slide16.xml><?xml version="1.0" encoding="utf-8"?>
 <p:sld xmlns:a="http://schemas.openxmlformats.org/drawingml/2006/main" xmlns:r="http://schemas.openxmlformats.org/officeDocument/2006/relationships" xmlns:p="http://schemas.openxmlformats.org/presentationml/2006/main">
   <p:cSld name="Slide 16">
+    <p:bg>
+      <p:bgPr>
+        <a:blipFill dpi="0" rotWithShape="1">
+          <a:blip r:embed="rId1">
+            <a:lum/>
+          </a:blip>
+          <a:srcRect/>
+          <a:stretch>
+            <a:fillRect/>
+          </a:stretch>
+        </a:blipFill>
+        <a:effectLst/>
+      </p:bgPr>
+    </p:bg>
+    <p:spTree>
+      <p:nvGrpSpPr>
+        <p:cNvPr id="1" name=""/>
+        <p:cNvGrpSpPr/>
+        <p:nvPr/>
+      </p:nvGrpSpPr>
+      <p:grpSpPr>
+        <a:xfrm>
+          <a:off x="0" y="0"/>
+          <a:ext cx="0" cy="0"/>
+          <a:chOff x="0" y="0"/>
+          <a:chExt cx="0" cy="0"/>
+        </a:xfrm>
+      </p:grpSpPr>
+    </p:spTree>
+  </p:cSld>
+  <p:clrMapOvr>
+    <a:masterClrMapping/>
+  </p:clrMapOvr>
+</p:sld>
+</file>
+
+<file path=ppt/slides/slide17.xml><?xml version="1.0" encoding="utf-8"?>
+<p:sld xmlns:a="http://schemas.openxmlformats.org/drawingml/2006/main" xmlns:r="http://schemas.openxmlformats.org/officeDocument/2006/relationships" xmlns:p="http://schemas.openxmlformats.org/presentationml/2006/main">
+  <p:cSld name="Slide 17">
     <p:bg>
       <p:bgPr>
         <a:blipFill dpi="0" rotWithShape="1">
